--- a/cours/Dialogues_TICE/Presentations_PPTX/TICE Niveau 1 - Introduction to ICT (Grok)/Dialogue_03_What_is_the_difference_between_informatique_and_ICT.pptx
+++ b/cours/Dialogues_TICE/Presentations_PPTX/TICE Niveau 1 - Introduction to ICT (Grok)/Dialogue_03_What_is_the_difference_between_informatique_and_ICT.pptx
@@ -2843,7 +2843,7 @@
           <a:solidFill>
             <a:schemeClr val="tx1"/>
           </a:solidFill>
-          <a:latin typeface="+mj-lt"/>
+          <a:latin typeface="Poppins"/>
           <a:ea typeface="+mj-ea"/>
           <a:cs typeface="+mj-cs"/>
         </a:defRPr>
@@ -2860,7 +2860,7 @@
           <a:solidFill>
             <a:schemeClr val="tx1"/>
           </a:solidFill>
-          <a:latin typeface="+mn-lt"/>
+          <a:latin typeface="Poppins"/>
           <a:ea typeface="+mn-ea"/>
           <a:cs typeface="+mn-cs"/>
         </a:defRPr>
@@ -2875,7 +2875,7 @@
           <a:solidFill>
             <a:schemeClr val="tx1"/>
           </a:solidFill>
-          <a:latin typeface="+mn-lt"/>
+          <a:latin typeface="Poppins"/>
           <a:ea typeface="+mn-ea"/>
           <a:cs typeface="+mn-cs"/>
         </a:defRPr>
@@ -2890,7 +2890,7 @@
           <a:solidFill>
             <a:schemeClr val="tx1"/>
           </a:solidFill>
-          <a:latin typeface="+mn-lt"/>
+          <a:latin typeface="Poppins"/>
           <a:ea typeface="+mn-ea"/>
           <a:cs typeface="+mn-cs"/>
         </a:defRPr>
@@ -2905,7 +2905,7 @@
           <a:solidFill>
             <a:schemeClr val="tx1"/>
           </a:solidFill>
-          <a:latin typeface="+mn-lt"/>
+          <a:latin typeface="Poppins"/>
           <a:ea typeface="+mn-ea"/>
           <a:cs typeface="+mn-cs"/>
         </a:defRPr>
@@ -2920,7 +2920,7 @@
           <a:solidFill>
             <a:schemeClr val="tx1"/>
           </a:solidFill>
-          <a:latin typeface="+mn-lt"/>
+          <a:latin typeface="Poppins"/>
           <a:ea typeface="+mn-ea"/>
           <a:cs typeface="+mn-cs"/>
         </a:defRPr>
@@ -2935,7 +2935,7 @@
           <a:solidFill>
             <a:schemeClr val="tx1"/>
           </a:solidFill>
-          <a:latin typeface="+mn-lt"/>
+          <a:latin typeface="Poppins"/>
           <a:ea typeface="+mn-ea"/>
           <a:cs typeface="+mn-cs"/>
         </a:defRPr>
@@ -2950,7 +2950,7 @@
           <a:solidFill>
             <a:schemeClr val="tx1"/>
           </a:solidFill>
-          <a:latin typeface="+mn-lt"/>
+          <a:latin typeface="Poppins"/>
           <a:ea typeface="+mn-ea"/>
           <a:cs typeface="+mn-cs"/>
         </a:defRPr>
@@ -2965,7 +2965,7 @@
           <a:solidFill>
             <a:schemeClr val="tx1"/>
           </a:solidFill>
-          <a:latin typeface="+mn-lt"/>
+          <a:latin typeface="Poppins"/>
           <a:ea typeface="+mn-ea"/>
           <a:cs typeface="+mn-cs"/>
         </a:defRPr>
@@ -2980,7 +2980,7 @@
           <a:solidFill>
             <a:schemeClr val="tx1"/>
           </a:solidFill>
-          <a:latin typeface="+mn-lt"/>
+          <a:latin typeface="Poppins"/>
           <a:ea typeface="+mn-ea"/>
           <a:cs typeface="+mn-cs"/>
         </a:defRPr>
@@ -2995,7 +2995,7 @@
           <a:solidFill>
             <a:schemeClr val="tx1"/>
           </a:solidFill>
-          <a:latin typeface="+mn-lt"/>
+          <a:latin typeface="Poppins"/>
           <a:ea typeface="+mn-ea"/>
           <a:cs typeface="+mn-cs"/>
         </a:defRPr>
@@ -3005,7 +3005,7 @@
           <a:solidFill>
             <a:schemeClr val="tx1"/>
           </a:solidFill>
-          <a:latin typeface="+mn-lt"/>
+          <a:latin typeface="Poppins"/>
           <a:ea typeface="+mn-ea"/>
           <a:cs typeface="+mn-cs"/>
         </a:defRPr>
@@ -3015,7 +3015,7 @@
           <a:solidFill>
             <a:schemeClr val="tx1"/>
           </a:solidFill>
-          <a:latin typeface="+mn-lt"/>
+          <a:latin typeface="Poppins"/>
           <a:ea typeface="+mn-ea"/>
           <a:cs typeface="+mn-cs"/>
         </a:defRPr>
@@ -3025,7 +3025,7 @@
           <a:solidFill>
             <a:schemeClr val="tx1"/>
           </a:solidFill>
-          <a:latin typeface="+mn-lt"/>
+          <a:latin typeface="Poppins"/>
           <a:ea typeface="+mn-ea"/>
           <a:cs typeface="+mn-cs"/>
         </a:defRPr>
@@ -3035,7 +3035,7 @@
           <a:solidFill>
             <a:schemeClr val="tx1"/>
           </a:solidFill>
-          <a:latin typeface="+mn-lt"/>
+          <a:latin typeface="Poppins"/>
           <a:ea typeface="+mn-ea"/>
           <a:cs typeface="+mn-cs"/>
         </a:defRPr>
@@ -3045,7 +3045,7 @@
           <a:solidFill>
             <a:schemeClr val="tx1"/>
           </a:solidFill>
-          <a:latin typeface="+mn-lt"/>
+          <a:latin typeface="Poppins"/>
           <a:ea typeface="+mn-ea"/>
           <a:cs typeface="+mn-cs"/>
         </a:defRPr>
@@ -3055,7 +3055,7 @@
           <a:solidFill>
             <a:schemeClr val="tx1"/>
           </a:solidFill>
-          <a:latin typeface="+mn-lt"/>
+          <a:latin typeface="Poppins"/>
           <a:ea typeface="+mn-ea"/>
           <a:cs typeface="+mn-cs"/>
         </a:defRPr>
@@ -3065,7 +3065,7 @@
           <a:solidFill>
             <a:schemeClr val="tx1"/>
           </a:solidFill>
-          <a:latin typeface="+mn-lt"/>
+          <a:latin typeface="Poppins"/>
           <a:ea typeface="+mn-ea"/>
           <a:cs typeface="+mn-cs"/>
         </a:defRPr>
@@ -3075,7 +3075,7 @@
           <a:solidFill>
             <a:schemeClr val="tx1"/>
           </a:solidFill>
-          <a:latin typeface="+mn-lt"/>
+          <a:latin typeface="Poppins"/>
           <a:ea typeface="+mn-ea"/>
           <a:cs typeface="+mn-cs"/>
         </a:defRPr>
@@ -3090,9 +3090,7 @@
   <p:cSld>
     <p:bg>
       <p:bgPr>
-        <a:solidFill>
-          <a:srgbClr val="1A5C33"/>
-        </a:solidFill>
+        <a:solidFill>val="006847"/&gt;</a:solidFill>
         <a:effectLst/>
       </p:bgPr>
     </p:bg>
@@ -3127,10 +3125,8 @@
           <a:p>
             <a:pPr algn="ctr">
               <a:defRPr sz="3200" b="1">
-                <a:solidFill>
-                  <a:srgbClr val="FFFFFF"/>
-                </a:solidFill>
-                <a:latin typeface="Calibri"/>
+                <a:solidFill>val="FFFFFF"/&gt;</a:solidFill>
+                <a:latin typeface="Poppins"/>
               </a:defRPr>
             </a:pPr>
             <a:r>
@@ -3163,10 +3159,8 @@
           <a:p>
             <a:pPr algn="ctr">
               <a:defRPr sz="2000" b="0">
-                <a:solidFill>
-                  <a:srgbClr val="C5D9C7"/>
-                </a:solidFill>
-                <a:latin typeface="Calibri"/>
+                <a:solidFill>val="DFE5EA"/&gt;</a:solidFill>
+                <a:latin typeface="Poppins"/>
               </a:defRPr>
             </a:pPr>
             <a:r>
@@ -3199,10 +3193,8 @@
           <a:p>
             <a:pPr algn="ctr">
               <a:defRPr sz="1400" b="0">
-                <a:solidFill>
-                  <a:srgbClr val="A0C0A8"/>
-                </a:solidFill>
-                <a:latin typeface="Calibri"/>
+                <a:solidFill>val="B7C9BE"/&gt;</a:solidFill>
+                <a:latin typeface="Poppins"/>
               </a:defRPr>
             </a:pPr>
             <a:r>
@@ -3235,14 +3227,53 @@
           <a:p>
             <a:pPr algn="ctr">
               <a:defRPr sz="1200" b="0">
+                <a:solidFill>val="93B39E"/&gt;</a:solidFill>
+                <a:latin typeface="Poppins"/>
+              </a:defRPr>
+            </a:pPr>
+            <a:r>
+              <a:t>Dialogue 3 / 21</a:t>
+            </a:r>
+          </a:p>
+        </p:txBody>
+      </p:sp>
+      <p:sp>
+        <p:nvSpPr>
+          <p:cNvPr id="990001" name="Pied de page FLE"/>
+          <p:cNvSpPr>
+            <a:spLocks noGrp="1"/>
+          </p:cNvSpPr>
+          <p:nvPr/>
+        </p:nvSpPr>
+        <p:spPr>
+          <a:xfrm>
+            <a:off x="2880360" y="640080"/>
+            <a:ext cx="4572000" cy="274320"/>
+          </a:xfrm>
+          <a:prstGeom prst="rect">
+            <a:avLst/>
+          </a:prstGeom>
+        </p:spPr>
+        <p:txBody>
+          <a:bodyPr anchor="b"/>
+          <a:lstStyle/>
+          <a:p>
+            <a:pPr algn="r">
+              <a:defRPr sz="900">
                 <a:solidFill>
-                  <a:srgbClr val="80B088"/>
+                  <a:srgbClr val="9AA7B6"/>
                 </a:solidFill>
-                <a:latin typeface="Calibri"/>
+                <a:latin typeface="Poppins"/>
               </a:defRPr>
             </a:pPr>
             <a:r>
-              <a:t>Dialogue 3 / 21</a:t>
+              <a:rPr lang="fr-FR" sz="900">
+                <a:solidFill>
+                  <a:srgbClr val="9AA7B6"/>
+                </a:solidFill>
+                <a:latin typeface="Poppins"/>
+              </a:rPr>
+              <a:t>Université de Mostaganem — Dr. Madani BELACEL</a:t>
             </a:r>
           </a:p>
         </p:txBody>
@@ -3260,9 +3291,7 @@
   <p:cSld>
     <p:bg>
       <p:bgPr>
-        <a:solidFill>
-          <a:srgbClr val="FFFFFF"/>
-        </a:solidFill>
+        <a:solidFill>val="FFFFFF"/&gt;</a:solidFill>
         <a:effectLst/>
       </p:bgPr>
     </p:bg>
@@ -3287,9 +3316,7 @@
           <a:prstGeom prst="rect">
             <a:avLst/>
           </a:prstGeom>
-          <a:solidFill>
-            <a:srgbClr val="2C6E49"/>
-          </a:solidFill>
+          <a:solidFill>val="00875B"/&gt;</a:solidFill>
           <a:ln>
             <a:noFill/>
           </a:ln>
@@ -3340,10 +3367,8 @@
           <a:p>
             <a:pPr algn="l">
               <a:defRPr sz="1000" b="0">
-                <a:solidFill>
-                  <a:srgbClr val="666666"/>
-                </a:solidFill>
-                <a:latin typeface="Calibri"/>
+                <a:solidFill>val="69788B"/&gt;</a:solidFill>
+                <a:latin typeface="Poppins"/>
               </a:defRPr>
             </a:pPr>
             <a:r>
@@ -3376,10 +3401,8 @@
           <a:p>
             <a:pPr algn="r">
               <a:defRPr sz="1000" b="0">
-                <a:solidFill>
-                  <a:srgbClr val="666666"/>
-                </a:solidFill>
-                <a:latin typeface="Calibri"/>
+                <a:solidFill>val="69788B"/&gt;</a:solidFill>
+                <a:latin typeface="Poppins"/>
               </a:defRPr>
             </a:pPr>
             <a:r>
@@ -3412,10 +3435,8 @@
           <a:p>
             <a:pPr algn="l">
               <a:defRPr sz="2400" b="1">
-                <a:solidFill>
-                  <a:srgbClr val="B45309"/>
-                </a:solidFill>
-                <a:latin typeface="Calibri"/>
+                <a:solidFill>val="F0B429"/&gt;</a:solidFill>
+                <a:latin typeface="Poppins"/>
               </a:defRPr>
             </a:pPr>
             <a:r>
@@ -3448,10 +3469,8 @@
           <a:p>
             <a:pPr algn="l">
               <a:defRPr sz="2200" b="0">
-                <a:solidFill>
-                  <a:srgbClr val="222222"/>
-                </a:solidFill>
-                <a:latin typeface="Calibri"/>
+                <a:solidFill>val="22344A"/&gt;</a:solidFill>
+                <a:latin typeface="Poppins"/>
               </a:defRPr>
             </a:pPr>
             <a:r>
@@ -3474,9 +3493,7 @@
           <a:prstGeom prst="rect">
             <a:avLst/>
           </a:prstGeom>
-          <a:solidFill>
-            <a:srgbClr val="E8F0E9"/>
-          </a:solidFill>
+          <a:solidFill>val="F4F6F8"/&gt;</a:solidFill>
           <a:ln>
             <a:noFill/>
           </a:ln>
@@ -3527,10 +3544,8 @@
           <a:p>
             <a:pPr algn="l">
               <a:defRPr sz="1100" b="1">
-                <a:solidFill>
-                  <a:srgbClr val="2C6E49"/>
-                </a:solidFill>
-                <a:latin typeface="Calibri"/>
+                <a:solidFill>val="00875B"/&gt;</a:solidFill>
+                <a:latin typeface="Poppins"/>
               </a:defRPr>
             </a:pPr>
             <a:r>
@@ -3563,10 +3578,8 @@
           <a:p>
             <a:pPr algn="l">
               <a:defRPr sz="2000" b="0">
-                <a:solidFill>
-                  <a:srgbClr val="1A3C6E"/>
-                </a:solidFill>
-                <a:latin typeface="Calibri"/>
+                <a:solidFill>val="34495E"/&gt;</a:solidFill>
+                <a:latin typeface="Poppins"/>
               </a:defRPr>
             </a:pPr>
             <a:r>
@@ -3599,10 +3612,8 @@
           <a:p>
             <a:pPr algn="l">
               <a:defRPr sz="900" b="0">
-                <a:solidFill>
-                  <a:srgbClr val="666666"/>
-                </a:solidFill>
-                <a:latin typeface="Calibri"/>
+                <a:solidFill>val="69788B"/&gt;</a:solidFill>
+                <a:latin typeface="Poppins"/>
               </a:defRPr>
             </a:pPr>
             <a:r>
@@ -3625,9 +3636,7 @@
           <a:prstGeom prst="rect">
             <a:avLst/>
           </a:prstGeom>
-          <a:solidFill>
-            <a:srgbClr val="1A5C33"/>
-          </a:solidFill>
+          <a:solidFill>val="006847"/&gt;</a:solidFill>
           <a:ln>
             <a:noFill/>
           </a:ln>
@@ -3654,6 +3663,47 @@
           </a:p>
         </p:txBody>
       </p:sp>
+      <p:sp>
+        <p:nvSpPr>
+          <p:cNvPr id="990001" name="Pied de page FLE"/>
+          <p:cNvSpPr>
+            <a:spLocks noGrp="1"/>
+          </p:cNvSpPr>
+          <p:nvPr/>
+        </p:nvSpPr>
+        <p:spPr>
+          <a:xfrm>
+            <a:off x="4343400" y="-384048"/>
+            <a:ext cx="4572000" cy="274320"/>
+          </a:xfrm>
+          <a:prstGeom prst="rect">
+            <a:avLst/>
+          </a:prstGeom>
+        </p:spPr>
+        <p:txBody>
+          <a:bodyPr anchor="b"/>
+          <a:lstStyle/>
+          <a:p>
+            <a:pPr algn="r">
+              <a:defRPr sz="900">
+                <a:solidFill>
+                  <a:srgbClr val="9AA7B6"/>
+                </a:solidFill>
+                <a:latin typeface="Poppins"/>
+              </a:defRPr>
+            </a:pPr>
+            <a:r>
+              <a:rPr lang="fr-FR" sz="900">
+                <a:solidFill>
+                  <a:srgbClr val="9AA7B6"/>
+                </a:solidFill>
+                <a:latin typeface="Poppins"/>
+              </a:rPr>
+              <a:t>Université de Mostaganem — Dr. Madani BELACEL</a:t>
+            </a:r>
+          </a:p>
+        </p:txBody>
+      </p:sp>
     </p:spTree>
   </p:cSld>
   <p:clrMapOvr>
@@ -3667,9 +3717,7 @@
   <p:cSld>
     <p:bg>
       <p:bgPr>
-        <a:solidFill>
-          <a:srgbClr val="FFFFFF"/>
-        </a:solidFill>
+        <a:solidFill>val="FFFFFF"/&gt;</a:solidFill>
         <a:effectLst/>
       </p:bgPr>
     </p:bg>
@@ -3694,9 +3742,7 @@
           <a:prstGeom prst="rect">
             <a:avLst/>
           </a:prstGeom>
-          <a:solidFill>
-            <a:srgbClr val="2C6E49"/>
-          </a:solidFill>
+          <a:solidFill>val="00875B"/&gt;</a:solidFill>
           <a:ln>
             <a:noFill/>
           </a:ln>
@@ -3747,10 +3793,8 @@
           <a:p>
             <a:pPr algn="l">
               <a:defRPr sz="1000" b="0">
-                <a:solidFill>
-                  <a:srgbClr val="666666"/>
-                </a:solidFill>
-                <a:latin typeface="Calibri"/>
+                <a:solidFill>val="69788B"/&gt;</a:solidFill>
+                <a:latin typeface="Poppins"/>
               </a:defRPr>
             </a:pPr>
             <a:r>
@@ -3783,10 +3827,8 @@
           <a:p>
             <a:pPr algn="r">
               <a:defRPr sz="1000" b="0">
-                <a:solidFill>
-                  <a:srgbClr val="666666"/>
-                </a:solidFill>
-                <a:latin typeface="Calibri"/>
+                <a:solidFill>val="69788B"/&gt;</a:solidFill>
+                <a:latin typeface="Poppins"/>
               </a:defRPr>
             </a:pPr>
             <a:r>
@@ -3819,10 +3861,8 @@
           <a:p>
             <a:pPr algn="l">
               <a:defRPr sz="2400" b="1">
-                <a:solidFill>
-                  <a:srgbClr val="B45309"/>
-                </a:solidFill>
-                <a:latin typeface="Calibri"/>
+                <a:solidFill>val="F0B429"/&gt;</a:solidFill>
+                <a:latin typeface="Poppins"/>
               </a:defRPr>
             </a:pPr>
             <a:r>
@@ -3855,10 +3895,8 @@
           <a:p>
             <a:pPr algn="l">
               <a:defRPr sz="2200" b="0">
-                <a:solidFill>
-                  <a:srgbClr val="222222"/>
-                </a:solidFill>
-                <a:latin typeface="Calibri"/>
+                <a:solidFill>val="22344A"/&gt;</a:solidFill>
+                <a:latin typeface="Poppins"/>
               </a:defRPr>
             </a:pPr>
             <a:r>
@@ -3881,9 +3919,7 @@
           <a:prstGeom prst="rect">
             <a:avLst/>
           </a:prstGeom>
-          <a:solidFill>
-            <a:srgbClr val="E8F0E9"/>
-          </a:solidFill>
+          <a:solidFill>val="F4F6F8"/&gt;</a:solidFill>
           <a:ln>
             <a:noFill/>
           </a:ln>
@@ -3934,10 +3970,8 @@
           <a:p>
             <a:pPr algn="l">
               <a:defRPr sz="1100" b="1">
-                <a:solidFill>
-                  <a:srgbClr val="2C6E49"/>
-                </a:solidFill>
-                <a:latin typeface="Calibri"/>
+                <a:solidFill>val="00875B"/&gt;</a:solidFill>
+                <a:latin typeface="Poppins"/>
               </a:defRPr>
             </a:pPr>
             <a:r>
@@ -3970,10 +4004,8 @@
           <a:p>
             <a:pPr algn="l">
               <a:defRPr sz="2000" b="0">
-                <a:solidFill>
-                  <a:srgbClr val="1A3C6E"/>
-                </a:solidFill>
-                <a:latin typeface="Calibri"/>
+                <a:solidFill>val="34495E"/&gt;</a:solidFill>
+                <a:latin typeface="Poppins"/>
               </a:defRPr>
             </a:pPr>
             <a:r>
@@ -4006,10 +4038,8 @@
           <a:p>
             <a:pPr algn="l">
               <a:defRPr sz="900" b="0">
-                <a:solidFill>
-                  <a:srgbClr val="666666"/>
-                </a:solidFill>
-                <a:latin typeface="Calibri"/>
+                <a:solidFill>val="69788B"/&gt;</a:solidFill>
+                <a:latin typeface="Poppins"/>
               </a:defRPr>
             </a:pPr>
             <a:r>
@@ -4032,9 +4062,7 @@
           <a:prstGeom prst="rect">
             <a:avLst/>
           </a:prstGeom>
-          <a:solidFill>
-            <a:srgbClr val="1A5C33"/>
-          </a:solidFill>
+          <a:solidFill>val="006847"/&gt;</a:solidFill>
           <a:ln>
             <a:noFill/>
           </a:ln>
@@ -4061,6 +4089,47 @@
           </a:p>
         </p:txBody>
       </p:sp>
+      <p:sp>
+        <p:nvSpPr>
+          <p:cNvPr id="990001" name="Pied de page FLE"/>
+          <p:cNvSpPr>
+            <a:spLocks noGrp="1"/>
+          </p:cNvSpPr>
+          <p:nvPr/>
+        </p:nvSpPr>
+        <p:spPr>
+          <a:xfrm>
+            <a:off x="4343400" y="-384048"/>
+            <a:ext cx="4572000" cy="274320"/>
+          </a:xfrm>
+          <a:prstGeom prst="rect">
+            <a:avLst/>
+          </a:prstGeom>
+        </p:spPr>
+        <p:txBody>
+          <a:bodyPr anchor="b"/>
+          <a:lstStyle/>
+          <a:p>
+            <a:pPr algn="r">
+              <a:defRPr sz="900">
+                <a:solidFill>
+                  <a:srgbClr val="9AA7B6"/>
+                </a:solidFill>
+                <a:latin typeface="Poppins"/>
+              </a:defRPr>
+            </a:pPr>
+            <a:r>
+              <a:rPr lang="fr-FR" sz="900">
+                <a:solidFill>
+                  <a:srgbClr val="9AA7B6"/>
+                </a:solidFill>
+                <a:latin typeface="Poppins"/>
+              </a:rPr>
+              <a:t>Université de Mostaganem — Dr. Madani BELACEL</a:t>
+            </a:r>
+          </a:p>
+        </p:txBody>
+      </p:sp>
     </p:spTree>
   </p:cSld>
   <p:clrMapOvr>
@@ -4074,9 +4143,7 @@
   <p:cSld>
     <p:bg>
       <p:bgPr>
-        <a:solidFill>
-          <a:srgbClr val="FFFFFF"/>
-        </a:solidFill>
+        <a:solidFill>val="FFFFFF"/&gt;</a:solidFill>
         <a:effectLst/>
       </p:bgPr>
     </p:bg>
@@ -4101,9 +4168,7 @@
           <a:prstGeom prst="rect">
             <a:avLst/>
           </a:prstGeom>
-          <a:solidFill>
-            <a:srgbClr val="2C6E49"/>
-          </a:solidFill>
+          <a:solidFill>val="00875B"/&gt;</a:solidFill>
           <a:ln>
             <a:noFill/>
           </a:ln>
@@ -4154,10 +4219,8 @@
           <a:p>
             <a:pPr algn="l">
               <a:defRPr sz="1000" b="0">
-                <a:solidFill>
-                  <a:srgbClr val="666666"/>
-                </a:solidFill>
-                <a:latin typeface="Calibri"/>
+                <a:solidFill>val="69788B"/&gt;</a:solidFill>
+                <a:latin typeface="Poppins"/>
               </a:defRPr>
             </a:pPr>
             <a:r>
@@ -4190,10 +4253,8 @@
           <a:p>
             <a:pPr algn="r">
               <a:defRPr sz="1000" b="0">
-                <a:solidFill>
-                  <a:srgbClr val="666666"/>
-                </a:solidFill>
-                <a:latin typeface="Calibri"/>
+                <a:solidFill>val="69788B"/&gt;</a:solidFill>
+                <a:latin typeface="Poppins"/>
               </a:defRPr>
             </a:pPr>
             <a:r>
@@ -4226,10 +4287,8 @@
           <a:p>
             <a:pPr algn="l">
               <a:defRPr sz="2400" b="1">
-                <a:solidFill>
-                  <a:srgbClr val="B45309"/>
-                </a:solidFill>
-                <a:latin typeface="Calibri"/>
+                <a:solidFill>val="F0B429"/&gt;</a:solidFill>
+                <a:latin typeface="Poppins"/>
               </a:defRPr>
             </a:pPr>
             <a:r>
@@ -4262,10 +4321,8 @@
           <a:p>
             <a:pPr algn="l">
               <a:defRPr sz="2200" b="0">
-                <a:solidFill>
-                  <a:srgbClr val="222222"/>
-                </a:solidFill>
-                <a:latin typeface="Calibri"/>
+                <a:solidFill>val="22344A"/&gt;</a:solidFill>
+                <a:latin typeface="Poppins"/>
               </a:defRPr>
             </a:pPr>
             <a:r>
@@ -4288,9 +4345,7 @@
           <a:prstGeom prst="rect">
             <a:avLst/>
           </a:prstGeom>
-          <a:solidFill>
-            <a:srgbClr val="E8F0E9"/>
-          </a:solidFill>
+          <a:solidFill>val="F4F6F8"/&gt;</a:solidFill>
           <a:ln>
             <a:noFill/>
           </a:ln>
@@ -4341,10 +4396,8 @@
           <a:p>
             <a:pPr algn="l">
               <a:defRPr sz="1100" b="1">
-                <a:solidFill>
-                  <a:srgbClr val="2C6E49"/>
-                </a:solidFill>
-                <a:latin typeface="Calibri"/>
+                <a:solidFill>val="00875B"/&gt;</a:solidFill>
+                <a:latin typeface="Poppins"/>
               </a:defRPr>
             </a:pPr>
             <a:r>
@@ -4377,10 +4430,8 @@
           <a:p>
             <a:pPr algn="l">
               <a:defRPr sz="2000" b="0">
-                <a:solidFill>
-                  <a:srgbClr val="1A3C6E"/>
-                </a:solidFill>
-                <a:latin typeface="Calibri"/>
+                <a:solidFill>val="34495E"/&gt;</a:solidFill>
+                <a:latin typeface="Poppins"/>
               </a:defRPr>
             </a:pPr>
             <a:r>
@@ -4413,10 +4464,8 @@
           <a:p>
             <a:pPr algn="l">
               <a:defRPr sz="900" b="0">
-                <a:solidFill>
-                  <a:srgbClr val="666666"/>
-                </a:solidFill>
-                <a:latin typeface="Calibri"/>
+                <a:solidFill>val="69788B"/&gt;</a:solidFill>
+                <a:latin typeface="Poppins"/>
               </a:defRPr>
             </a:pPr>
             <a:r>
@@ -4439,9 +4488,7 @@
           <a:prstGeom prst="rect">
             <a:avLst/>
           </a:prstGeom>
-          <a:solidFill>
-            <a:srgbClr val="1A5C33"/>
-          </a:solidFill>
+          <a:solidFill>val="006847"/&gt;</a:solidFill>
           <a:ln>
             <a:noFill/>
           </a:ln>
@@ -4468,6 +4515,47 @@
           </a:p>
         </p:txBody>
       </p:sp>
+      <p:sp>
+        <p:nvSpPr>
+          <p:cNvPr id="990001" name="Pied de page FLE"/>
+          <p:cNvSpPr>
+            <a:spLocks noGrp="1"/>
+          </p:cNvSpPr>
+          <p:nvPr/>
+        </p:nvSpPr>
+        <p:spPr>
+          <a:xfrm>
+            <a:off x="4343400" y="-384048"/>
+            <a:ext cx="4572000" cy="274320"/>
+          </a:xfrm>
+          <a:prstGeom prst="rect">
+            <a:avLst/>
+          </a:prstGeom>
+        </p:spPr>
+        <p:txBody>
+          <a:bodyPr anchor="b"/>
+          <a:lstStyle/>
+          <a:p>
+            <a:pPr algn="r">
+              <a:defRPr sz="900">
+                <a:solidFill>
+                  <a:srgbClr val="9AA7B6"/>
+                </a:solidFill>
+                <a:latin typeface="Poppins"/>
+              </a:defRPr>
+            </a:pPr>
+            <a:r>
+              <a:rPr lang="fr-FR" sz="900">
+                <a:solidFill>
+                  <a:srgbClr val="9AA7B6"/>
+                </a:solidFill>
+                <a:latin typeface="Poppins"/>
+              </a:rPr>
+              <a:t>Université de Mostaganem — Dr. Madani BELACEL</a:t>
+            </a:r>
+          </a:p>
+        </p:txBody>
+      </p:sp>
     </p:spTree>
   </p:cSld>
   <p:clrMapOvr>
@@ -4481,9 +4569,7 @@
   <p:cSld>
     <p:bg>
       <p:bgPr>
-        <a:solidFill>
-          <a:srgbClr val="FFFFFF"/>
-        </a:solidFill>
+        <a:solidFill>val="FFFFFF"/&gt;</a:solidFill>
         <a:effectLst/>
       </p:bgPr>
     </p:bg>
@@ -4508,9 +4594,7 @@
           <a:prstGeom prst="rect">
             <a:avLst/>
           </a:prstGeom>
-          <a:solidFill>
-            <a:srgbClr val="2C6E49"/>
-          </a:solidFill>
+          <a:solidFill>val="00875B"/&gt;</a:solidFill>
           <a:ln>
             <a:noFill/>
           </a:ln>
@@ -4561,10 +4645,8 @@
           <a:p>
             <a:pPr algn="l">
               <a:defRPr sz="1000" b="0">
-                <a:solidFill>
-                  <a:srgbClr val="666666"/>
-                </a:solidFill>
-                <a:latin typeface="Calibri"/>
+                <a:solidFill>val="69788B"/&gt;</a:solidFill>
+                <a:latin typeface="Poppins"/>
               </a:defRPr>
             </a:pPr>
             <a:r>
@@ -4597,10 +4679,8 @@
           <a:p>
             <a:pPr algn="r">
               <a:defRPr sz="1000" b="0">
-                <a:solidFill>
-                  <a:srgbClr val="666666"/>
-                </a:solidFill>
-                <a:latin typeface="Calibri"/>
+                <a:solidFill>val="69788B"/&gt;</a:solidFill>
+                <a:latin typeface="Poppins"/>
               </a:defRPr>
             </a:pPr>
             <a:r>
@@ -4633,10 +4713,8 @@
           <a:p>
             <a:pPr algn="l">
               <a:defRPr sz="2400" b="1">
-                <a:solidFill>
-                  <a:srgbClr val="B45309"/>
-                </a:solidFill>
-                <a:latin typeface="Calibri"/>
+                <a:solidFill>val="F0B429"/&gt;</a:solidFill>
+                <a:latin typeface="Poppins"/>
               </a:defRPr>
             </a:pPr>
             <a:r>
@@ -4669,10 +4747,8 @@
           <a:p>
             <a:pPr algn="l">
               <a:defRPr sz="2200" b="0">
-                <a:solidFill>
-                  <a:srgbClr val="222222"/>
-                </a:solidFill>
-                <a:latin typeface="Calibri"/>
+                <a:solidFill>val="22344A"/&gt;</a:solidFill>
+                <a:latin typeface="Poppins"/>
               </a:defRPr>
             </a:pPr>
             <a:r>
@@ -4695,9 +4771,7 @@
           <a:prstGeom prst="rect">
             <a:avLst/>
           </a:prstGeom>
-          <a:solidFill>
-            <a:srgbClr val="E8F0E9"/>
-          </a:solidFill>
+          <a:solidFill>val="F4F6F8"/&gt;</a:solidFill>
           <a:ln>
             <a:noFill/>
           </a:ln>
@@ -4748,10 +4822,8 @@
           <a:p>
             <a:pPr algn="l">
               <a:defRPr sz="1100" b="1">
-                <a:solidFill>
-                  <a:srgbClr val="2C6E49"/>
-                </a:solidFill>
-                <a:latin typeface="Calibri"/>
+                <a:solidFill>val="00875B"/&gt;</a:solidFill>
+                <a:latin typeface="Poppins"/>
               </a:defRPr>
             </a:pPr>
             <a:r>
@@ -4784,10 +4856,8 @@
           <a:p>
             <a:pPr algn="l">
               <a:defRPr sz="2000" b="0">
-                <a:solidFill>
-                  <a:srgbClr val="1A3C6E"/>
-                </a:solidFill>
-                <a:latin typeface="Calibri"/>
+                <a:solidFill>val="34495E"/&gt;</a:solidFill>
+                <a:latin typeface="Poppins"/>
               </a:defRPr>
             </a:pPr>
             <a:r>
@@ -4820,10 +4890,8 @@
           <a:p>
             <a:pPr algn="l">
               <a:defRPr sz="900" b="0">
-                <a:solidFill>
-                  <a:srgbClr val="666666"/>
-                </a:solidFill>
-                <a:latin typeface="Calibri"/>
+                <a:solidFill>val="69788B"/&gt;</a:solidFill>
+                <a:latin typeface="Poppins"/>
               </a:defRPr>
             </a:pPr>
             <a:r>
@@ -4846,9 +4914,7 @@
           <a:prstGeom prst="rect">
             <a:avLst/>
           </a:prstGeom>
-          <a:solidFill>
-            <a:srgbClr val="1A5C33"/>
-          </a:solidFill>
+          <a:solidFill>val="006847"/&gt;</a:solidFill>
           <a:ln>
             <a:noFill/>
           </a:ln>
@@ -4875,6 +4941,47 @@
           </a:p>
         </p:txBody>
       </p:sp>
+      <p:sp>
+        <p:nvSpPr>
+          <p:cNvPr id="990001" name="Pied de page FLE"/>
+          <p:cNvSpPr>
+            <a:spLocks noGrp="1"/>
+          </p:cNvSpPr>
+          <p:nvPr/>
+        </p:nvSpPr>
+        <p:spPr>
+          <a:xfrm>
+            <a:off x="4343400" y="-384048"/>
+            <a:ext cx="4572000" cy="274320"/>
+          </a:xfrm>
+          <a:prstGeom prst="rect">
+            <a:avLst/>
+          </a:prstGeom>
+        </p:spPr>
+        <p:txBody>
+          <a:bodyPr anchor="b"/>
+          <a:lstStyle/>
+          <a:p>
+            <a:pPr algn="r">
+              <a:defRPr sz="900">
+                <a:solidFill>
+                  <a:srgbClr val="9AA7B6"/>
+                </a:solidFill>
+                <a:latin typeface="Poppins"/>
+              </a:defRPr>
+            </a:pPr>
+            <a:r>
+              <a:rPr lang="fr-FR" sz="900">
+                <a:solidFill>
+                  <a:srgbClr val="9AA7B6"/>
+                </a:solidFill>
+                <a:latin typeface="Poppins"/>
+              </a:rPr>
+              <a:t>Université de Mostaganem — Dr. Madani BELACEL</a:t>
+            </a:r>
+          </a:p>
+        </p:txBody>
+      </p:sp>
     </p:spTree>
   </p:cSld>
   <p:clrMapOvr>
@@ -4888,9 +4995,7 @@
   <p:cSld>
     <p:bg>
       <p:bgPr>
-        <a:solidFill>
-          <a:srgbClr val="FFFFFF"/>
-        </a:solidFill>
+        <a:solidFill>val="FFFFFF"/&gt;</a:solidFill>
         <a:effectLst/>
       </p:bgPr>
     </p:bg>
@@ -4915,9 +5020,7 @@
           <a:prstGeom prst="rect">
             <a:avLst/>
           </a:prstGeom>
-          <a:solidFill>
-            <a:srgbClr val="2C6E49"/>
-          </a:solidFill>
+          <a:solidFill>val="00875B"/&gt;</a:solidFill>
           <a:ln>
             <a:noFill/>
           </a:ln>
@@ -4968,10 +5071,8 @@
           <a:p>
             <a:pPr algn="l">
               <a:defRPr sz="1000" b="0">
-                <a:solidFill>
-                  <a:srgbClr val="666666"/>
-                </a:solidFill>
-                <a:latin typeface="Calibri"/>
+                <a:solidFill>val="69788B"/&gt;</a:solidFill>
+                <a:latin typeface="Poppins"/>
               </a:defRPr>
             </a:pPr>
             <a:r>
@@ -5004,10 +5105,8 @@
           <a:p>
             <a:pPr algn="r">
               <a:defRPr sz="1000" b="0">
-                <a:solidFill>
-                  <a:srgbClr val="666666"/>
-                </a:solidFill>
-                <a:latin typeface="Calibri"/>
+                <a:solidFill>val="69788B"/&gt;</a:solidFill>
+                <a:latin typeface="Poppins"/>
               </a:defRPr>
             </a:pPr>
             <a:r>
@@ -5040,10 +5139,8 @@
           <a:p>
             <a:pPr algn="l">
               <a:defRPr sz="2400" b="1">
-                <a:solidFill>
-                  <a:srgbClr val="B45309"/>
-                </a:solidFill>
-                <a:latin typeface="Calibri"/>
+                <a:solidFill>val="F0B429"/&gt;</a:solidFill>
+                <a:latin typeface="Poppins"/>
               </a:defRPr>
             </a:pPr>
             <a:r>
@@ -5076,10 +5173,8 @@
           <a:p>
             <a:pPr algn="l">
               <a:defRPr sz="2200" b="0">
-                <a:solidFill>
-                  <a:srgbClr val="222222"/>
-                </a:solidFill>
-                <a:latin typeface="Calibri"/>
+                <a:solidFill>val="22344A"/&gt;</a:solidFill>
+                <a:latin typeface="Poppins"/>
               </a:defRPr>
             </a:pPr>
             <a:r>
@@ -5102,9 +5197,7 @@
           <a:prstGeom prst="rect">
             <a:avLst/>
           </a:prstGeom>
-          <a:solidFill>
-            <a:srgbClr val="E8F0E9"/>
-          </a:solidFill>
+          <a:solidFill>val="F4F6F8"/&gt;</a:solidFill>
           <a:ln>
             <a:noFill/>
           </a:ln>
@@ -5155,10 +5248,8 @@
           <a:p>
             <a:pPr algn="l">
               <a:defRPr sz="1100" b="1">
-                <a:solidFill>
-                  <a:srgbClr val="2C6E49"/>
-                </a:solidFill>
-                <a:latin typeface="Calibri"/>
+                <a:solidFill>val="00875B"/&gt;</a:solidFill>
+                <a:latin typeface="Poppins"/>
               </a:defRPr>
             </a:pPr>
             <a:r>
@@ -5191,10 +5282,8 @@
           <a:p>
             <a:pPr algn="l">
               <a:defRPr sz="2000" b="0">
-                <a:solidFill>
-                  <a:srgbClr val="1A3C6E"/>
-                </a:solidFill>
-                <a:latin typeface="Calibri"/>
+                <a:solidFill>val="34495E"/&gt;</a:solidFill>
+                <a:latin typeface="Poppins"/>
               </a:defRPr>
             </a:pPr>
             <a:r>
@@ -5227,10 +5316,8 @@
           <a:p>
             <a:pPr algn="l">
               <a:defRPr sz="900" b="0">
-                <a:solidFill>
-                  <a:srgbClr val="666666"/>
-                </a:solidFill>
-                <a:latin typeface="Calibri"/>
+                <a:solidFill>val="69788B"/&gt;</a:solidFill>
+                <a:latin typeface="Poppins"/>
               </a:defRPr>
             </a:pPr>
             <a:r>
@@ -5253,9 +5340,7 @@
           <a:prstGeom prst="rect">
             <a:avLst/>
           </a:prstGeom>
-          <a:solidFill>
-            <a:srgbClr val="1A5C33"/>
-          </a:solidFill>
+          <a:solidFill>val="006847"/&gt;</a:solidFill>
           <a:ln>
             <a:noFill/>
           </a:ln>
@@ -5282,6 +5367,47 @@
           </a:p>
         </p:txBody>
       </p:sp>
+      <p:sp>
+        <p:nvSpPr>
+          <p:cNvPr id="990001" name="Pied de page FLE"/>
+          <p:cNvSpPr>
+            <a:spLocks noGrp="1"/>
+          </p:cNvSpPr>
+          <p:nvPr/>
+        </p:nvSpPr>
+        <p:spPr>
+          <a:xfrm>
+            <a:off x="4343400" y="-384048"/>
+            <a:ext cx="4572000" cy="274320"/>
+          </a:xfrm>
+          <a:prstGeom prst="rect">
+            <a:avLst/>
+          </a:prstGeom>
+        </p:spPr>
+        <p:txBody>
+          <a:bodyPr anchor="b"/>
+          <a:lstStyle/>
+          <a:p>
+            <a:pPr algn="r">
+              <a:defRPr sz="900">
+                <a:solidFill>
+                  <a:srgbClr val="9AA7B6"/>
+                </a:solidFill>
+                <a:latin typeface="Poppins"/>
+              </a:defRPr>
+            </a:pPr>
+            <a:r>
+              <a:rPr lang="fr-FR" sz="900">
+                <a:solidFill>
+                  <a:srgbClr val="9AA7B6"/>
+                </a:solidFill>
+                <a:latin typeface="Poppins"/>
+              </a:rPr>
+              <a:t>Université de Mostaganem — Dr. Madani BELACEL</a:t>
+            </a:r>
+          </a:p>
+        </p:txBody>
+      </p:sp>
     </p:spTree>
   </p:cSld>
   <p:clrMapOvr>
@@ -5295,9 +5421,7 @@
   <p:cSld>
     <p:bg>
       <p:bgPr>
-        <a:solidFill>
-          <a:srgbClr val="FFFFFF"/>
-        </a:solidFill>
+        <a:solidFill>val="FFFFFF"/&gt;</a:solidFill>
         <a:effectLst/>
       </p:bgPr>
     </p:bg>
@@ -5322,9 +5446,7 @@
           <a:prstGeom prst="rect">
             <a:avLst/>
           </a:prstGeom>
-          <a:solidFill>
-            <a:srgbClr val="2C6E49"/>
-          </a:solidFill>
+          <a:solidFill>val="00875B"/&gt;</a:solidFill>
           <a:ln>
             <a:noFill/>
           </a:ln>
@@ -5375,10 +5497,8 @@
           <a:p>
             <a:pPr algn="l">
               <a:defRPr sz="1000" b="0">
-                <a:solidFill>
-                  <a:srgbClr val="666666"/>
-                </a:solidFill>
-                <a:latin typeface="Calibri"/>
+                <a:solidFill>val="69788B"/&gt;</a:solidFill>
+                <a:latin typeface="Poppins"/>
               </a:defRPr>
             </a:pPr>
             <a:r>
@@ -5411,10 +5531,8 @@
           <a:p>
             <a:pPr algn="r">
               <a:defRPr sz="1000" b="0">
-                <a:solidFill>
-                  <a:srgbClr val="666666"/>
-                </a:solidFill>
-                <a:latin typeface="Calibri"/>
+                <a:solidFill>val="69788B"/&gt;</a:solidFill>
+                <a:latin typeface="Poppins"/>
               </a:defRPr>
             </a:pPr>
             <a:r>
@@ -5447,10 +5565,8 @@
           <a:p>
             <a:pPr algn="l">
               <a:defRPr sz="2400" b="1">
-                <a:solidFill>
-                  <a:srgbClr val="B45309"/>
-                </a:solidFill>
-                <a:latin typeface="Calibri"/>
+                <a:solidFill>val="F0B429"/&gt;</a:solidFill>
+                <a:latin typeface="Poppins"/>
               </a:defRPr>
             </a:pPr>
             <a:r>
@@ -5483,10 +5599,8 @@
           <a:p>
             <a:pPr algn="l">
               <a:defRPr sz="2200" b="0">
-                <a:solidFill>
-                  <a:srgbClr val="222222"/>
-                </a:solidFill>
-                <a:latin typeface="Calibri"/>
+                <a:solidFill>val="22344A"/&gt;</a:solidFill>
+                <a:latin typeface="Poppins"/>
               </a:defRPr>
             </a:pPr>
             <a:r>
@@ -5509,9 +5623,7 @@
           <a:prstGeom prst="rect">
             <a:avLst/>
           </a:prstGeom>
-          <a:solidFill>
-            <a:srgbClr val="E8F0E9"/>
-          </a:solidFill>
+          <a:solidFill>val="F4F6F8"/&gt;</a:solidFill>
           <a:ln>
             <a:noFill/>
           </a:ln>
@@ -5562,10 +5674,8 @@
           <a:p>
             <a:pPr algn="l">
               <a:defRPr sz="1100" b="1">
-                <a:solidFill>
-                  <a:srgbClr val="2C6E49"/>
-                </a:solidFill>
-                <a:latin typeface="Calibri"/>
+                <a:solidFill>val="00875B"/&gt;</a:solidFill>
+                <a:latin typeface="Poppins"/>
               </a:defRPr>
             </a:pPr>
             <a:r>
@@ -5598,10 +5708,8 @@
           <a:p>
             <a:pPr algn="l">
               <a:defRPr sz="2000" b="0">
-                <a:solidFill>
-                  <a:srgbClr val="1A3C6E"/>
-                </a:solidFill>
-                <a:latin typeface="Calibri"/>
+                <a:solidFill>val="34495E"/&gt;</a:solidFill>
+                <a:latin typeface="Poppins"/>
               </a:defRPr>
             </a:pPr>
             <a:r>
@@ -5634,10 +5742,8 @@
           <a:p>
             <a:pPr algn="l">
               <a:defRPr sz="900" b="0">
-                <a:solidFill>
-                  <a:srgbClr val="666666"/>
-                </a:solidFill>
-                <a:latin typeface="Calibri"/>
+                <a:solidFill>val="69788B"/&gt;</a:solidFill>
+                <a:latin typeface="Poppins"/>
               </a:defRPr>
             </a:pPr>
             <a:r>
@@ -5660,9 +5766,7 @@
           <a:prstGeom prst="rect">
             <a:avLst/>
           </a:prstGeom>
-          <a:solidFill>
-            <a:srgbClr val="1A5C33"/>
-          </a:solidFill>
+          <a:solidFill>val="006847"/&gt;</a:solidFill>
           <a:ln>
             <a:noFill/>
           </a:ln>
@@ -5689,6 +5793,47 @@
           </a:p>
         </p:txBody>
       </p:sp>
+      <p:sp>
+        <p:nvSpPr>
+          <p:cNvPr id="990001" name="Pied de page FLE"/>
+          <p:cNvSpPr>
+            <a:spLocks noGrp="1"/>
+          </p:cNvSpPr>
+          <p:nvPr/>
+        </p:nvSpPr>
+        <p:spPr>
+          <a:xfrm>
+            <a:off x="4343400" y="-384048"/>
+            <a:ext cx="4572000" cy="274320"/>
+          </a:xfrm>
+          <a:prstGeom prst="rect">
+            <a:avLst/>
+          </a:prstGeom>
+        </p:spPr>
+        <p:txBody>
+          <a:bodyPr anchor="b"/>
+          <a:lstStyle/>
+          <a:p>
+            <a:pPr algn="r">
+              <a:defRPr sz="900">
+                <a:solidFill>
+                  <a:srgbClr val="9AA7B6"/>
+                </a:solidFill>
+                <a:latin typeface="Poppins"/>
+              </a:defRPr>
+            </a:pPr>
+            <a:r>
+              <a:rPr lang="fr-FR" sz="900">
+                <a:solidFill>
+                  <a:srgbClr val="9AA7B6"/>
+                </a:solidFill>
+                <a:latin typeface="Poppins"/>
+              </a:rPr>
+              <a:t>Université de Mostaganem — Dr. Madani BELACEL</a:t>
+            </a:r>
+          </a:p>
+        </p:txBody>
+      </p:sp>
     </p:spTree>
   </p:cSld>
   <p:clrMapOvr>
@@ -5702,9 +5847,7 @@
   <p:cSld>
     <p:bg>
       <p:bgPr>
-        <a:solidFill>
-          <a:srgbClr val="FFFFFF"/>
-        </a:solidFill>
+        <a:solidFill>val="FFFFFF"/&gt;</a:solidFill>
         <a:effectLst/>
       </p:bgPr>
     </p:bg>
@@ -5729,9 +5872,7 @@
           <a:prstGeom prst="rect">
             <a:avLst/>
           </a:prstGeom>
-          <a:solidFill>
-            <a:srgbClr val="2C6E49"/>
-          </a:solidFill>
+          <a:solidFill>val="00875B"/&gt;</a:solidFill>
           <a:ln>
             <a:noFill/>
           </a:ln>
@@ -5782,10 +5923,8 @@
           <a:p>
             <a:pPr algn="l">
               <a:defRPr sz="1000" b="0">
-                <a:solidFill>
-                  <a:srgbClr val="666666"/>
-                </a:solidFill>
-                <a:latin typeface="Calibri"/>
+                <a:solidFill>val="69788B"/&gt;</a:solidFill>
+                <a:latin typeface="Poppins"/>
               </a:defRPr>
             </a:pPr>
             <a:r>
@@ -5818,10 +5957,8 @@
           <a:p>
             <a:pPr algn="r">
               <a:defRPr sz="1000" b="0">
-                <a:solidFill>
-                  <a:srgbClr val="666666"/>
-                </a:solidFill>
-                <a:latin typeface="Calibri"/>
+                <a:solidFill>val="69788B"/&gt;</a:solidFill>
+                <a:latin typeface="Poppins"/>
               </a:defRPr>
             </a:pPr>
             <a:r>
@@ -5854,10 +5991,8 @@
           <a:p>
             <a:pPr algn="l">
               <a:defRPr sz="2400" b="1">
-                <a:solidFill>
-                  <a:srgbClr val="B45309"/>
-                </a:solidFill>
-                <a:latin typeface="Calibri"/>
+                <a:solidFill>val="F0B429"/&gt;</a:solidFill>
+                <a:latin typeface="Poppins"/>
               </a:defRPr>
             </a:pPr>
             <a:r>
@@ -5890,10 +6025,8 @@
           <a:p>
             <a:pPr algn="l">
               <a:defRPr sz="2200" b="0">
-                <a:solidFill>
-                  <a:srgbClr val="222222"/>
-                </a:solidFill>
-                <a:latin typeface="Calibri"/>
+                <a:solidFill>val="22344A"/&gt;</a:solidFill>
+                <a:latin typeface="Poppins"/>
               </a:defRPr>
             </a:pPr>
             <a:r>
@@ -5916,9 +6049,7 @@
           <a:prstGeom prst="rect">
             <a:avLst/>
           </a:prstGeom>
-          <a:solidFill>
-            <a:srgbClr val="E8F0E9"/>
-          </a:solidFill>
+          <a:solidFill>val="F4F6F8"/&gt;</a:solidFill>
           <a:ln>
             <a:noFill/>
           </a:ln>
@@ -5969,10 +6100,8 @@
           <a:p>
             <a:pPr algn="l">
               <a:defRPr sz="1100" b="1">
-                <a:solidFill>
-                  <a:srgbClr val="2C6E49"/>
-                </a:solidFill>
-                <a:latin typeface="Calibri"/>
+                <a:solidFill>val="00875B"/&gt;</a:solidFill>
+                <a:latin typeface="Poppins"/>
               </a:defRPr>
             </a:pPr>
             <a:r>
@@ -6005,10 +6134,8 @@
           <a:p>
             <a:pPr algn="l">
               <a:defRPr sz="2000" b="0">
-                <a:solidFill>
-                  <a:srgbClr val="1A3C6E"/>
-                </a:solidFill>
-                <a:latin typeface="Calibri"/>
+                <a:solidFill>val="34495E"/&gt;</a:solidFill>
+                <a:latin typeface="Poppins"/>
               </a:defRPr>
             </a:pPr>
             <a:r>
@@ -6041,10 +6168,8 @@
           <a:p>
             <a:pPr algn="l">
               <a:defRPr sz="900" b="0">
-                <a:solidFill>
-                  <a:srgbClr val="666666"/>
-                </a:solidFill>
-                <a:latin typeface="Calibri"/>
+                <a:solidFill>val="69788B"/&gt;</a:solidFill>
+                <a:latin typeface="Poppins"/>
               </a:defRPr>
             </a:pPr>
             <a:r>
@@ -6067,9 +6192,7 @@
           <a:prstGeom prst="rect">
             <a:avLst/>
           </a:prstGeom>
-          <a:solidFill>
-            <a:srgbClr val="1A5C33"/>
-          </a:solidFill>
+          <a:solidFill>val="006847"/&gt;</a:solidFill>
           <a:ln>
             <a:noFill/>
           </a:ln>
@@ -6093,6 +6216,47 @@
           <a:lstStyle/>
           <a:p>
             <a:pPr algn="ctr"/>
+          </a:p>
+        </p:txBody>
+      </p:sp>
+      <p:sp>
+        <p:nvSpPr>
+          <p:cNvPr id="990001" name="Pied de page FLE"/>
+          <p:cNvSpPr>
+            <a:spLocks noGrp="1"/>
+          </p:cNvSpPr>
+          <p:nvPr/>
+        </p:nvSpPr>
+        <p:spPr>
+          <a:xfrm>
+            <a:off x="4343400" y="-384048"/>
+            <a:ext cx="4572000" cy="274320"/>
+          </a:xfrm>
+          <a:prstGeom prst="rect">
+            <a:avLst/>
+          </a:prstGeom>
+        </p:spPr>
+        <p:txBody>
+          <a:bodyPr anchor="b"/>
+          <a:lstStyle/>
+          <a:p>
+            <a:pPr algn="r">
+              <a:defRPr sz="900">
+                <a:solidFill>
+                  <a:srgbClr val="9AA7B6"/>
+                </a:solidFill>
+                <a:latin typeface="Poppins"/>
+              </a:defRPr>
+            </a:pPr>
+            <a:r>
+              <a:rPr lang="fr-FR" sz="900">
+                <a:solidFill>
+                  <a:srgbClr val="9AA7B6"/>
+                </a:solidFill>
+                <a:latin typeface="Poppins"/>
+              </a:rPr>
+              <a:t>Université de Mostaganem — Dr. Madani BELACEL</a:t>
+            </a:r>
           </a:p>
         </p:txBody>
       </p:sp>
@@ -6147,7 +6311,7 @@
     </a:clrScheme>
     <a:fontScheme name="Office">
       <a:majorFont>
-        <a:latin typeface="Calibri"/>
+        <a:latin typeface="Poppins"/>
         <a:ea typeface=""/>
         <a:cs typeface=""/>
         <a:font script="Jpan" typeface="ＭＳ Ｐゴシック"/>
@@ -6182,7 +6346,7 @@
         <a:font script="Geor" typeface="Sylfaen"/>
       </a:majorFont>
       <a:minorFont>
-        <a:latin typeface="Calibri"/>
+        <a:latin typeface="Poppins"/>
         <a:ea typeface=""/>
         <a:cs typeface=""/>
         <a:font script="Jpan" typeface="ＭＳ Ｐゴシック"/>
